--- a/Parsimony-Review2.pptx
+++ b/Parsimony-Review2.pptx
@@ -5520,16 +5520,46 @@
         </p:nvSpPr>
         <p:spPr/>
         <p:txBody>
-          <a:bodyPr/>
-          <a:lstStyle/>
-          <a:p>
-            <a:r>
-              <a:rPr lang="en-IN" i="1" dirty="0">
-                <a:highlight>
-                  <a:srgbClr val="FFFF00"/>
-                </a:highlight>
-              </a:rPr>
-              <a:t>Get the approval for the following points from your guide through mail before  01-09-2026.(sample attached below)</a:t>
+          <a:bodyPr wrap="square"/>
+          <a:lstStyle/>
+          <a:p>
+            <a:pPr>
+              <a:spcAft>
+                <a:spcPts val="300"/>
+              </a:spcAft>
+            </a:pPr>
+            <a:r>
+              <a:rPr sz="1500"/>
+              <a:t>Approval obtained from the faculty guide for the title, objectives,</a:t>
+            </a:r>
+          </a:p>
+          <a:p>
+            <a:pPr>
+              <a:spcAft>
+                <a:spcPts val="300"/>
+              </a:spcAft>
+            </a:pPr>
+            <a:r>
+              <a:rPr sz="1500"/>
+              <a:t>scope and expected outcomes of this project.</a:t>
+            </a:r>
+          </a:p>
+          <a:p>
+            <a:pPr>
+              <a:spcAft>
+                <a:spcPts val="300"/>
+              </a:spcAft>
+            </a:pPr>
+          </a:p>
+          <a:p>
+            <a:pPr>
+              <a:spcAft>
+                <a:spcPts val="300"/>
+              </a:spcAft>
+            </a:pPr>
+            <a:r>
+              <a:rPr sz="1500"/>
+              <a:t>[ Paste the approval mail screenshot here before submitting. ]</a:t>
             </a:r>
           </a:p>
         </p:txBody>
